--- a/presentation/QuPath_Rust.pptx
+++ b/presentation/QuPath_Rust.pptx
@@ -8941,7 +8941,7 @@
                   <a:srgbClr val="2B2B2B"/>
                 </a:solidFill>
               </a:rPr>
-              <a:t>docs/MEMO.md</a:t>
+              <a:t>docs/dev/MEMO.md</a:t>
             </a:r>
           </a:p>
         </p:txBody>
